--- a/01-精益工具知识库/PPT/精益工具知识库-封面与目录.pptx
+++ b/01-精益工具知识库/PPT/精益工具知识库-封面与目录.pptx
@@ -1337,6 +1337,10 @@
             <a:prstDash val="solid"/>
           </a:ln>
         </p:spPr>
+        <p:txBody>
+          <a:bodyPr/>
+          <a:p/>
+        </p:txBody>
       </p:sp>
       <p:sp>
         <p:nvSpPr>
@@ -1362,6 +1366,10 @@
             <a:prstDash val="solid"/>
           </a:ln>
         </p:spPr>
+        <p:txBody>
+          <a:bodyPr/>
+          <a:p/>
+        </p:txBody>
       </p:sp>
       <p:sp>
         <p:nvSpPr>
@@ -1387,6 +1395,10 @@
             <a:prstDash val="solid"/>
           </a:ln>
         </p:spPr>
+        <p:txBody>
+          <a:bodyPr/>
+          <a:p/>
+        </p:txBody>
       </p:sp>
       <p:sp>
         <p:nvSpPr>
@@ -1412,6 +1424,10 @@
             <a:prstDash val="solid"/>
           </a:ln>
         </p:spPr>
+        <p:txBody>
+          <a:bodyPr/>
+          <a:p/>
+        </p:txBody>
       </p:sp>
       <p:sp>
         <p:nvSpPr>
@@ -1437,6 +1453,10 @@
             <a:prstDash val="solid"/>
           </a:ln>
         </p:spPr>
+        <p:txBody>
+          <a:bodyPr/>
+          <a:p/>
+        </p:txBody>
       </p:sp>
       <p:sp>
         <p:nvSpPr>
@@ -1462,6 +1482,10 @@
             <a:prstDash val="solid"/>
           </a:ln>
         </p:spPr>
+        <p:txBody>
+          <a:bodyPr/>
+          <a:p/>
+        </p:txBody>
       </p:sp>
       <p:sp>
         <p:nvSpPr>
@@ -1535,7 +1559,7 @@
                 <a:ea typeface="Arial" pitchFamily="34" charset="-122"/>
                 <a:cs typeface="Arial" pitchFamily="34" charset="-120"/>
               </a:rPr>
-              <a:t>金属紧固件制造企业精益转型核心指南</a:t>
+              <a:t>离散制造企业精益转型核心指南</a:t>
             </a:r>
             <a:endParaRPr lang="en-US" sz="2000" dirty="0"/>
           </a:p>
@@ -1565,6 +1589,10 @@
             <a:prstDash val="solid"/>
           </a:ln>
         </p:spPr>
+        <p:txBody>
+          <a:bodyPr/>
+          <a:p/>
+        </p:txBody>
       </p:sp>
       <p:sp>
         <p:nvSpPr>
@@ -1590,6 +1618,10 @@
             <a:prstDash val="solid"/>
           </a:ln>
         </p:spPr>
+        <p:txBody>
+          <a:bodyPr/>
+          <a:p/>
+        </p:txBody>
       </p:sp>
       <p:sp>
         <p:nvSpPr>
@@ -1624,7 +1656,7 @@
                 <a:ea typeface="Arial" pitchFamily="34" charset="-122"/>
                 <a:cs typeface="Arial" pitchFamily="34" charset="-120"/>
               </a:rPr>
-              <a:t>打造适合紧固件行业的精益知识体系</a:t>
+              <a:t>打造适合制造业的精益知识体系</a:t>
             </a:r>
             <a:endParaRPr lang="en-US" sz="1400" dirty="0"/>
           </a:p>
@@ -1656,6 +1688,10 @@
             <a:prstDash val="solid"/>
           </a:ln>
         </p:spPr>
+        <p:txBody>
+          <a:bodyPr/>
+          <a:p/>
+        </p:txBody>
       </p:sp>
       <p:sp>
         <p:nvSpPr>
@@ -1681,6 +1717,10 @@
             <a:prstDash val="solid"/>
           </a:ln>
         </p:spPr>
+        <p:txBody>
+          <a:bodyPr/>
+          <a:p/>
+        </p:txBody>
       </p:sp>
       <p:sp>
         <p:nvSpPr>
@@ -1786,6 +1826,10 @@
             <a:prstDash val="solid"/>
           </a:ln>
         </p:spPr>
+        <p:txBody>
+          <a:bodyPr/>
+          <a:p/>
+        </p:txBody>
       </p:sp>
       <p:sp>
         <p:nvSpPr>
@@ -1811,6 +1855,10 @@
             <a:prstDash val="solid"/>
           </a:ln>
         </p:spPr>
+        <p:txBody>
+          <a:bodyPr/>
+          <a:p/>
+        </p:txBody>
       </p:sp>
       <p:sp>
         <p:nvSpPr>
@@ -1916,6 +1964,10 @@
             <a:prstDash val="solid"/>
           </a:ln>
         </p:spPr>
+        <p:txBody>
+          <a:bodyPr/>
+          <a:p/>
+        </p:txBody>
       </p:sp>
       <p:sp>
         <p:nvSpPr>
@@ -1941,6 +1993,10 @@
             <a:prstDash val="solid"/>
           </a:ln>
         </p:spPr>
+        <p:txBody>
+          <a:bodyPr/>
+          <a:p/>
+        </p:txBody>
       </p:sp>
       <p:sp>
         <p:nvSpPr>
@@ -2046,6 +2102,10 @@
             <a:prstDash val="solid"/>
           </a:ln>
         </p:spPr>
+        <p:txBody>
+          <a:bodyPr/>
+          <a:p/>
+        </p:txBody>
       </p:sp>
       <p:sp>
         <p:nvSpPr>
@@ -2071,6 +2131,10 @@
             <a:prstDash val="solid"/>
           </a:ln>
         </p:spPr>
+        <p:txBody>
+          <a:bodyPr/>
+          <a:p/>
+        </p:txBody>
       </p:sp>
       <p:sp>
         <p:nvSpPr>
@@ -2238,6 +2302,10 @@
             <a:prstDash val="solid"/>
           </a:ln>
         </p:spPr>
+        <p:txBody>
+          <a:bodyPr/>
+          <a:p/>
+        </p:txBody>
       </p:sp>
       <p:sp>
         <p:nvSpPr>
@@ -2263,6 +2331,10 @@
             <a:prstDash val="solid"/>
           </a:ln>
         </p:spPr>
+        <p:txBody>
+          <a:bodyPr/>
+          <a:p/>
+        </p:txBody>
       </p:sp>
       <p:sp>
         <p:nvSpPr>
@@ -2288,6 +2360,10 @@
             <a:prstDash val="solid"/>
           </a:ln>
         </p:spPr>
+        <p:txBody>
+          <a:bodyPr/>
+          <a:p/>
+        </p:txBody>
       </p:sp>
       <p:sp>
         <p:nvSpPr>
@@ -2393,6 +2469,10 @@
             <a:prstDash val="solid"/>
           </a:ln>
         </p:spPr>
+        <p:txBody>
+          <a:bodyPr/>
+          <a:p/>
+        </p:txBody>
       </p:sp>
       <p:sp>
         <p:nvSpPr>
@@ -2420,6 +2500,10 @@
             <a:prstDash val="solid"/>
           </a:ln>
         </p:spPr>
+        <p:txBody>
+          <a:bodyPr/>
+          <a:p/>
+        </p:txBody>
       </p:sp>
       <p:sp>
         <p:nvSpPr>
@@ -2445,6 +2529,10 @@
             <a:prstDash val="solid"/>
           </a:ln>
         </p:spPr>
+        <p:txBody>
+          <a:bodyPr/>
+          <a:p/>
+        </p:txBody>
       </p:sp>
       <p:sp>
         <p:nvSpPr>
@@ -2470,6 +2558,10 @@
             <a:prstDash val="solid"/>
           </a:ln>
         </p:spPr>
+        <p:txBody>
+          <a:bodyPr/>
+          <a:p/>
+        </p:txBody>
       </p:sp>
       <p:sp>
         <p:nvSpPr>
@@ -2573,6 +2665,10 @@
             <a:prstDash val="solid"/>
           </a:ln>
         </p:spPr>
+        <p:txBody>
+          <a:bodyPr/>
+          <a:p/>
+        </p:txBody>
       </p:sp>
       <p:sp>
         <p:nvSpPr>
@@ -2600,6 +2696,10 @@
             <a:prstDash val="solid"/>
           </a:ln>
         </p:spPr>
+        <p:txBody>
+          <a:bodyPr/>
+          <a:p/>
+        </p:txBody>
       </p:sp>
       <p:sp>
         <p:nvSpPr>
@@ -2627,6 +2727,10 @@
             <a:prstDash val="solid"/>
           </a:ln>
         </p:spPr>
+        <p:txBody>
+          <a:bodyPr/>
+          <a:p/>
+        </p:txBody>
       </p:sp>
       <p:sp>
         <p:nvSpPr>
@@ -2652,6 +2756,10 @@
             <a:prstDash val="solid"/>
           </a:ln>
         </p:spPr>
+        <p:txBody>
+          <a:bodyPr/>
+          <a:p/>
+        </p:txBody>
       </p:sp>
       <p:sp>
         <p:nvSpPr>
@@ -2677,6 +2785,10 @@
             <a:prstDash val="solid"/>
           </a:ln>
         </p:spPr>
+        <p:txBody>
+          <a:bodyPr/>
+          <a:p/>
+        </p:txBody>
       </p:sp>
       <p:sp>
         <p:nvSpPr>
@@ -2780,6 +2892,10 @@
             <a:prstDash val="solid"/>
           </a:ln>
         </p:spPr>
+        <p:txBody>
+          <a:bodyPr/>
+          <a:p/>
+        </p:txBody>
       </p:sp>
       <p:sp>
         <p:nvSpPr>
@@ -2807,6 +2923,10 @@
             <a:prstDash val="solid"/>
           </a:ln>
         </p:spPr>
+        <p:txBody>
+          <a:bodyPr/>
+          <a:p/>
+        </p:txBody>
       </p:sp>
       <p:sp>
         <p:nvSpPr>
@@ -2834,6 +2954,10 @@
             <a:prstDash val="solid"/>
           </a:ln>
         </p:spPr>
+        <p:txBody>
+          <a:bodyPr/>
+          <a:p/>
+        </p:txBody>
       </p:sp>
       <p:sp>
         <p:nvSpPr>
@@ -2859,6 +2983,10 @@
             <a:prstDash val="solid"/>
           </a:ln>
         </p:spPr>
+        <p:txBody>
+          <a:bodyPr/>
+          <a:p/>
+        </p:txBody>
       </p:sp>
       <p:sp>
         <p:nvSpPr>
@@ -2884,6 +3012,10 @@
             <a:prstDash val="solid"/>
           </a:ln>
         </p:spPr>
+        <p:txBody>
+          <a:bodyPr/>
+          <a:p/>
+        </p:txBody>
       </p:sp>
       <p:sp>
         <p:nvSpPr>
@@ -2987,6 +3119,10 @@
             <a:prstDash val="solid"/>
           </a:ln>
         </p:spPr>
+        <p:txBody>
+          <a:bodyPr/>
+          <a:p/>
+        </p:txBody>
       </p:sp>
       <p:sp>
         <p:nvSpPr>
@@ -3014,6 +3150,10 @@
             <a:prstDash val="solid"/>
           </a:ln>
         </p:spPr>
+        <p:txBody>
+          <a:bodyPr/>
+          <a:p/>
+        </p:txBody>
       </p:sp>
       <p:sp>
         <p:nvSpPr>
@@ -3041,6 +3181,10 @@
             <a:prstDash val="solid"/>
           </a:ln>
         </p:spPr>
+        <p:txBody>
+          <a:bodyPr/>
+          <a:p/>
+        </p:txBody>
       </p:sp>
       <p:sp>
         <p:nvSpPr>
@@ -3066,6 +3210,10 @@
             <a:prstDash val="solid"/>
           </a:ln>
         </p:spPr>
+        <p:txBody>
+          <a:bodyPr/>
+          <a:p/>
+        </p:txBody>
       </p:sp>
       <p:sp>
         <p:nvSpPr>
@@ -3091,6 +3239,10 @@
             <a:prstDash val="solid"/>
           </a:ln>
         </p:spPr>
+        <p:txBody>
+          <a:bodyPr/>
+          <a:p/>
+        </p:txBody>
       </p:sp>
       <p:sp>
         <p:nvSpPr>
@@ -3125,7 +3277,7 @@
                 <a:ea typeface="Arial Black" pitchFamily="34" charset="-122"/>
                 <a:cs typeface="Arial Black" pitchFamily="34" charset="-120"/>
               </a:rPr>
-              <a:t>04 紧固件行业应用</a:t>
+              <a:t>04 制造工序应用</a:t>
             </a:r>
             <a:endParaRPr lang="en-US" sz="1600" dirty="0"/>
           </a:p>
@@ -3164,7 +3316,7 @@
                 <a:ea typeface="Arial" pitchFamily="34" charset="-122"/>
                 <a:cs typeface="Arial" pitchFamily="34" charset="-120"/>
               </a:rPr>
-              <a:t>冷镦 . 搓丝 . 热处理 . 表面处理 . 包装</a:t>
+              <a:t>机加工 . 精加工 . 热处理 . 表面处理 . 包装</a:t>
             </a:r>
             <a:endParaRPr lang="en-US" sz="1100" dirty="0"/>
           </a:p>
@@ -3194,6 +3346,10 @@
             <a:prstDash val="solid"/>
           </a:ln>
         </p:spPr>
+        <p:txBody>
+          <a:bodyPr/>
+          <a:p/>
+        </p:txBody>
       </p:sp>
       <p:sp>
         <p:nvSpPr>
@@ -3221,6 +3377,10 @@
             <a:prstDash val="solid"/>
           </a:ln>
         </p:spPr>
+        <p:txBody>
+          <a:bodyPr/>
+          <a:p/>
+        </p:txBody>
       </p:sp>
       <p:sp>
         <p:nvSpPr>
@@ -3248,6 +3408,10 @@
             <a:prstDash val="solid"/>
           </a:ln>
         </p:spPr>
+        <p:txBody>
+          <a:bodyPr/>
+          <a:p/>
+        </p:txBody>
       </p:sp>
       <p:sp>
         <p:nvSpPr>
@@ -3273,6 +3437,10 @@
             <a:prstDash val="solid"/>
           </a:ln>
         </p:spPr>
+        <p:txBody>
+          <a:bodyPr/>
+          <a:p/>
+        </p:txBody>
       </p:sp>
       <p:sp>
         <p:nvSpPr>
@@ -3298,6 +3466,10 @@
             <a:prstDash val="solid"/>
           </a:ln>
         </p:spPr>
+        <p:txBody>
+          <a:bodyPr/>
+          <a:p/>
+        </p:txBody>
       </p:sp>
       <p:sp>
         <p:nvSpPr>
@@ -3401,6 +3573,10 @@
             <a:prstDash val="solid"/>
           </a:ln>
         </p:spPr>
+        <p:txBody>
+          <a:bodyPr/>
+          <a:p/>
+        </p:txBody>
       </p:sp>
       <p:sp>
         <p:nvSpPr>
@@ -3428,6 +3604,10 @@
             <a:prstDash val="solid"/>
           </a:ln>
         </p:spPr>
+        <p:txBody>
+          <a:bodyPr/>
+          <a:p/>
+        </p:txBody>
       </p:sp>
       <p:sp>
         <p:nvSpPr>
@@ -3455,6 +3635,10 @@
             <a:prstDash val="solid"/>
           </a:ln>
         </p:spPr>
+        <p:txBody>
+          <a:bodyPr/>
+          <a:p/>
+        </p:txBody>
       </p:sp>
       <p:sp>
         <p:nvSpPr>
@@ -3480,6 +3664,10 @@
             <a:prstDash val="solid"/>
           </a:ln>
         </p:spPr>
+        <p:txBody>
+          <a:bodyPr/>
+          <a:p/>
+        </p:txBody>
       </p:sp>
       <p:sp>
         <p:nvSpPr>
@@ -3505,6 +3693,10 @@
             <a:prstDash val="solid"/>
           </a:ln>
         </p:spPr>
+        <p:txBody>
+          <a:bodyPr/>
+          <a:p/>
+        </p:txBody>
       </p:sp>
       <p:sp>
         <p:nvSpPr>
@@ -3608,6 +3800,10 @@
             <a:prstDash val="solid"/>
           </a:ln>
         </p:spPr>
+        <p:txBody>
+          <a:bodyPr/>
+          <a:p/>
+        </p:txBody>
       </p:sp>
       <p:sp>
         <p:nvSpPr>
@@ -3633,6 +3829,10 @@
             <a:prstDash val="solid"/>
           </a:ln>
         </p:spPr>
+        <p:txBody>
+          <a:bodyPr/>
+          <a:p/>
+        </p:txBody>
       </p:sp>
       <p:sp>
         <p:nvSpPr>
@@ -3667,7 +3867,7 @@
                 <a:ea typeface="Arial" pitchFamily="34" charset="-122"/>
                 <a:cs typeface="Arial" pitchFamily="34" charset="-120"/>
               </a:rPr>
-              <a:t>共 6 大模块 | 13+ 核心工具 | 覆盖紧固件制造全流程</a:t>
+              <a:t>共 6 大模块 | 13+ 核心工具 | 覆盖制造全流程</a:t>
             </a:r>
             <a:endParaRPr lang="en-US" sz="1100" dirty="0"/>
           </a:p>
@@ -3722,6 +3922,10 @@
             <a:prstDash val="solid"/>
           </a:ln>
         </p:spPr>
+        <p:txBody>
+          <a:bodyPr/>
+          <a:p/>
+        </p:txBody>
       </p:sp>
       <p:sp>
         <p:nvSpPr>
@@ -3747,6 +3951,10 @@
             <a:prstDash val="solid"/>
           </a:ln>
         </p:spPr>
+        <p:txBody>
+          <a:bodyPr/>
+          <a:p/>
+        </p:txBody>
       </p:sp>
       <p:sp>
         <p:nvSpPr>
@@ -3772,6 +3980,10 @@
             <a:prstDash val="solid"/>
           </a:ln>
         </p:spPr>
+        <p:txBody>
+          <a:bodyPr/>
+          <a:p/>
+        </p:txBody>
       </p:sp>
       <p:sp>
         <p:nvSpPr>
@@ -3875,6 +4087,10 @@
             <a:prstDash val="solid"/>
           </a:ln>
         </p:spPr>
+        <p:txBody>
+          <a:bodyPr/>
+          <a:p/>
+        </p:txBody>
       </p:sp>
       <p:sp>
         <p:nvSpPr>
@@ -3978,6 +4194,10 @@
             <a:prstDash val="solid"/>
           </a:ln>
         </p:spPr>
+        <p:txBody>
+          <a:bodyPr/>
+          <a:p/>
+        </p:txBody>
       </p:sp>
       <p:sp>
         <p:nvSpPr>
@@ -4003,6 +4223,10 @@
             <a:prstDash val="solid"/>
           </a:ln>
         </p:spPr>
+        <p:txBody>
+          <a:bodyPr/>
+          <a:p/>
+        </p:txBody>
       </p:sp>
       <p:sp>
         <p:nvSpPr>
@@ -4106,6 +4330,10 @@
             <a:prstDash val="solid"/>
           </a:ln>
         </p:spPr>
+        <p:txBody>
+          <a:bodyPr/>
+          <a:p/>
+        </p:txBody>
       </p:sp>
       <p:sp>
         <p:nvSpPr>
@@ -4209,6 +4437,10 @@
             <a:prstDash val="solid"/>
           </a:ln>
         </p:spPr>
+        <p:txBody>
+          <a:bodyPr/>
+          <a:p/>
+        </p:txBody>
       </p:sp>
       <p:sp>
         <p:nvSpPr>
@@ -4234,6 +4466,10 @@
             <a:prstDash val="solid"/>
           </a:ln>
         </p:spPr>
+        <p:txBody>
+          <a:bodyPr/>
+          <a:p/>
+        </p:txBody>
       </p:sp>
       <p:sp>
         <p:nvSpPr>
@@ -4337,6 +4573,10 @@
             <a:prstDash val="solid"/>
           </a:ln>
         </p:spPr>
+        <p:txBody>
+          <a:bodyPr/>
+          <a:p/>
+        </p:txBody>
       </p:sp>
       <p:sp>
         <p:nvSpPr>
@@ -4440,6 +4680,10 @@
             <a:prstDash val="solid"/>
           </a:ln>
         </p:spPr>
+        <p:txBody>
+          <a:bodyPr/>
+          <a:p/>
+        </p:txBody>
       </p:sp>
       <p:sp>
         <p:nvSpPr>
@@ -4465,6 +4709,10 @@
             <a:prstDash val="solid"/>
           </a:ln>
         </p:spPr>
+        <p:txBody>
+          <a:bodyPr/>
+          <a:p/>
+        </p:txBody>
       </p:sp>
       <p:sp>
         <p:nvSpPr>
@@ -4568,6 +4816,10 @@
             <a:prstDash val="solid"/>
           </a:ln>
         </p:spPr>
+        <p:txBody>
+          <a:bodyPr/>
+          <a:p/>
+        </p:txBody>
       </p:sp>
       <p:sp>
         <p:nvSpPr>
@@ -4671,6 +4923,10 @@
             <a:prstDash val="solid"/>
           </a:ln>
         </p:spPr>
+        <p:txBody>
+          <a:bodyPr/>
+          <a:p/>
+        </p:txBody>
       </p:sp>
       <p:sp>
         <p:nvSpPr>
@@ -4696,6 +4952,10 @@
             <a:prstDash val="solid"/>
           </a:ln>
         </p:spPr>
+        <p:txBody>
+          <a:bodyPr/>
+          <a:p/>
+        </p:txBody>
       </p:sp>
       <p:sp>
         <p:nvSpPr>
@@ -4799,6 +5059,10 @@
             <a:prstDash val="solid"/>
           </a:ln>
         </p:spPr>
+        <p:txBody>
+          <a:bodyPr/>
+          <a:p/>
+        </p:txBody>
       </p:sp>
       <p:sp>
         <p:nvSpPr>
@@ -4980,6 +5244,10 @@
             <a:prstDash val="solid"/>
           </a:ln>
         </p:spPr>
+        <p:txBody>
+          <a:bodyPr/>
+          <a:p/>
+        </p:txBody>
       </p:sp>
       <p:sp>
         <p:nvSpPr>
@@ -5007,6 +5275,10 @@
             <a:prstDash val="solid"/>
           </a:ln>
         </p:spPr>
+        <p:txBody>
+          <a:bodyPr/>
+          <a:p/>
+        </p:txBody>
       </p:sp>
       <p:sp>
         <p:nvSpPr>
@@ -5071,6 +5343,10 @@
             <a:prstDash val="solid"/>
           </a:ln>
         </p:spPr>
+        <p:txBody>
+          <a:bodyPr/>
+          <a:p/>
+        </p:txBody>
       </p:sp>
       <p:sp>
         <p:nvSpPr>
@@ -5213,6 +5489,10 @@
             <a:prstDash val="solid"/>
           </a:ln>
         </p:spPr>
+        <p:txBody>
+          <a:bodyPr/>
+          <a:p/>
+        </p:txBody>
       </p:sp>
       <p:sp>
         <p:nvSpPr>
@@ -5355,6 +5635,10 @@
             <a:prstDash val="solid"/>
           </a:ln>
         </p:spPr>
+        <p:txBody>
+          <a:bodyPr/>
+          <a:p/>
+        </p:txBody>
       </p:sp>
       <p:sp>
         <p:nvSpPr>
@@ -5497,6 +5781,10 @@
             <a:prstDash val="solid"/>
           </a:ln>
         </p:spPr>
+        <p:txBody>
+          <a:bodyPr/>
+          <a:p/>
+        </p:txBody>
       </p:sp>
       <p:sp>
         <p:nvSpPr>
@@ -5639,6 +5927,10 @@
             <a:prstDash val="solid"/>
           </a:ln>
         </p:spPr>
+        <p:txBody>
+          <a:bodyPr/>
+          <a:p/>
+        </p:txBody>
       </p:sp>
       <p:sp>
         <p:nvSpPr>
@@ -5728,6 +6020,10 @@
             <a:prstDash val="solid"/>
           </a:ln>
         </p:spPr>
+        <p:txBody>
+          <a:bodyPr/>
+          <a:p/>
+        </p:txBody>
       </p:sp>
       <p:sp>
         <p:nvSpPr>
@@ -5753,6 +6049,10 @@
             <a:prstDash val="solid"/>
           </a:ln>
         </p:spPr>
+        <p:txBody>
+          <a:bodyPr/>
+          <a:p/>
+        </p:txBody>
       </p:sp>
       <p:sp>
         <p:nvSpPr>
@@ -5778,6 +6078,10 @@
             <a:prstDash val="solid"/>
           </a:ln>
         </p:spPr>
+        <p:txBody>
+          <a:bodyPr/>
+          <a:p/>
+        </p:txBody>
       </p:sp>
       <p:sp>
         <p:nvSpPr>
@@ -5883,6 +6187,10 @@
             <a:prstDash val="solid"/>
           </a:ln>
         </p:spPr>
+        <p:txBody>
+          <a:bodyPr/>
+          <a:p/>
+        </p:txBody>
       </p:sp>
       <p:sp>
         <p:nvSpPr>
@@ -5908,6 +6216,10 @@
             <a:prstDash val="solid"/>
           </a:ln>
         </p:spPr>
+        <p:txBody>
+          <a:bodyPr/>
+          <a:p/>
+        </p:txBody>
       </p:sp>
       <p:sp>
         <p:nvSpPr>
@@ -5933,6 +6245,10 @@
             <a:prstDash val="solid"/>
           </a:ln>
         </p:spPr>
+        <p:txBody>
+          <a:bodyPr/>
+          <a:p/>
+        </p:txBody>
       </p:sp>
       <p:sp>
         <p:nvSpPr>
@@ -6077,6 +6393,10 @@
             <a:prstDash val="solid"/>
           </a:ln>
         </p:spPr>
+        <p:txBody>
+          <a:bodyPr/>
+          <a:p/>
+        </p:txBody>
       </p:sp>
       <p:sp>
         <p:nvSpPr>
@@ -6104,6 +6424,10 @@
             <a:prstDash val="solid"/>
           </a:ln>
         </p:spPr>
+        <p:txBody>
+          <a:bodyPr/>
+          <a:p/>
+        </p:txBody>
       </p:sp>
       <p:sp>
         <p:nvSpPr>
@@ -6170,6 +6494,10 @@
             <a:prstDash val="solid"/>
           </a:ln>
         </p:spPr>
+        <p:txBody>
+          <a:bodyPr/>
+          <a:p/>
+        </p:txBody>
       </p:sp>
       <p:sp>
         <p:nvSpPr>
@@ -6236,6 +6564,10 @@
             <a:prstDash val="solid"/>
           </a:ln>
         </p:spPr>
+        <p:txBody>
+          <a:bodyPr/>
+          <a:p/>
+        </p:txBody>
       </p:sp>
       <p:sp>
         <p:nvSpPr>
@@ -6261,6 +6593,10 @@
             <a:prstDash val="solid"/>
           </a:ln>
         </p:spPr>
+        <p:txBody>
+          <a:bodyPr/>
+          <a:p/>
+        </p:txBody>
       </p:sp>
       <p:sp>
         <p:nvSpPr>
@@ -6286,6 +6622,10 @@
             <a:prstDash val="solid"/>
           </a:ln>
         </p:spPr>
+        <p:txBody>
+          <a:bodyPr/>
+          <a:p/>
+        </p:txBody>
       </p:sp>
       <p:sp>
         <p:nvSpPr>
@@ -6430,6 +6770,10 @@
             <a:prstDash val="solid"/>
           </a:ln>
         </p:spPr>
+        <p:txBody>
+          <a:bodyPr/>
+          <a:p/>
+        </p:txBody>
       </p:sp>
       <p:sp>
         <p:nvSpPr>
@@ -6457,6 +6801,10 @@
             <a:prstDash val="solid"/>
           </a:ln>
         </p:spPr>
+        <p:txBody>
+          <a:bodyPr/>
+          <a:p/>
+        </p:txBody>
       </p:sp>
       <p:sp>
         <p:nvSpPr>
@@ -6523,6 +6871,10 @@
             <a:prstDash val="solid"/>
           </a:ln>
         </p:spPr>
+        <p:txBody>
+          <a:bodyPr/>
+          <a:p/>
+        </p:txBody>
       </p:sp>
       <p:sp>
         <p:nvSpPr>
@@ -6589,6 +6941,10 @@
             <a:prstDash val="solid"/>
           </a:ln>
         </p:spPr>
+        <p:txBody>
+          <a:bodyPr/>
+          <a:p/>
+        </p:txBody>
       </p:sp>
       <p:sp>
         <p:nvSpPr>
@@ -6614,6 +6970,10 @@
             <a:prstDash val="solid"/>
           </a:ln>
         </p:spPr>
+        <p:txBody>
+          <a:bodyPr/>
+          <a:p/>
+        </p:txBody>
       </p:sp>
       <p:sp>
         <p:nvSpPr>
@@ -6639,6 +6999,10 @@
             <a:prstDash val="solid"/>
           </a:ln>
         </p:spPr>
+        <p:txBody>
+          <a:bodyPr/>
+          <a:p/>
+        </p:txBody>
       </p:sp>
       <p:sp>
         <p:nvSpPr>
@@ -6783,6 +7147,10 @@
             <a:prstDash val="solid"/>
           </a:ln>
         </p:spPr>
+        <p:txBody>
+          <a:bodyPr/>
+          <a:p/>
+        </p:txBody>
       </p:sp>
       <p:sp>
         <p:nvSpPr>
@@ -6810,6 +7178,10 @@
             <a:prstDash val="solid"/>
           </a:ln>
         </p:spPr>
+        <p:txBody>
+          <a:bodyPr/>
+          <a:p/>
+        </p:txBody>
       </p:sp>
       <p:sp>
         <p:nvSpPr>
@@ -6876,6 +7248,10 @@
             <a:prstDash val="solid"/>
           </a:ln>
         </p:spPr>
+        <p:txBody>
+          <a:bodyPr/>
+          <a:p/>
+        </p:txBody>
       </p:sp>
       <p:sp>
         <p:nvSpPr>
@@ -6942,6 +7318,10 @@
             <a:prstDash val="solid"/>
           </a:ln>
         </p:spPr>
+        <p:txBody>
+          <a:bodyPr/>
+          <a:p/>
+        </p:txBody>
       </p:sp>
       <p:sp>
         <p:nvSpPr>
@@ -6967,6 +7347,10 @@
             <a:prstDash val="solid"/>
           </a:ln>
         </p:spPr>
+        <p:txBody>
+          <a:bodyPr/>
+          <a:p/>
+        </p:txBody>
       </p:sp>
       <p:sp>
         <p:nvSpPr>
@@ -6992,6 +7376,10 @@
             <a:prstDash val="solid"/>
           </a:ln>
         </p:spPr>
+        <p:txBody>
+          <a:bodyPr/>
+          <a:p/>
+        </p:txBody>
       </p:sp>
       <p:sp>
         <p:nvSpPr>
@@ -7136,6 +7524,10 @@
             <a:prstDash val="solid"/>
           </a:ln>
         </p:spPr>
+        <p:txBody>
+          <a:bodyPr/>
+          <a:p/>
+        </p:txBody>
       </p:sp>
       <p:sp>
         <p:nvSpPr>
@@ -7163,6 +7555,10 @@
             <a:prstDash val="solid"/>
           </a:ln>
         </p:spPr>
+        <p:txBody>
+          <a:bodyPr/>
+          <a:p/>
+        </p:txBody>
       </p:sp>
       <p:sp>
         <p:nvSpPr>
@@ -7229,6 +7625,10 @@
             <a:prstDash val="solid"/>
           </a:ln>
         </p:spPr>
+        <p:txBody>
+          <a:bodyPr/>
+          <a:p/>
+        </p:txBody>
       </p:sp>
       <p:sp>
         <p:nvSpPr>
@@ -7295,6 +7695,10 @@
             <a:prstDash val="solid"/>
           </a:ln>
         </p:spPr>
+        <p:txBody>
+          <a:bodyPr/>
+          <a:p/>
+        </p:txBody>
       </p:sp>
       <p:sp>
         <p:nvSpPr>
@@ -7320,6 +7724,10 @@
             <a:prstDash val="solid"/>
           </a:ln>
         </p:spPr>
+        <p:txBody>
+          <a:bodyPr/>
+          <a:p/>
+        </p:txBody>
       </p:sp>
       <p:sp>
         <p:nvSpPr>
@@ -7345,6 +7753,10 @@
             <a:prstDash val="solid"/>
           </a:ln>
         </p:spPr>
+        <p:txBody>
+          <a:bodyPr/>
+          <a:p/>
+        </p:txBody>
       </p:sp>
       <p:sp>
         <p:nvSpPr>
@@ -7489,6 +7901,10 @@
             <a:prstDash val="solid"/>
           </a:ln>
         </p:spPr>
+        <p:txBody>
+          <a:bodyPr/>
+          <a:p/>
+        </p:txBody>
       </p:sp>
       <p:sp>
         <p:nvSpPr>
@@ -7516,6 +7932,10 @@
             <a:prstDash val="solid"/>
           </a:ln>
         </p:spPr>
+        <p:txBody>
+          <a:bodyPr/>
+          <a:p/>
+        </p:txBody>
       </p:sp>
       <p:sp>
         <p:nvSpPr>
@@ -7582,6 +8002,10 @@
             <a:prstDash val="solid"/>
           </a:ln>
         </p:spPr>
+        <p:txBody>
+          <a:bodyPr/>
+          <a:p/>
+        </p:txBody>
       </p:sp>
       <p:sp>
         <p:nvSpPr>
@@ -7648,6 +8072,10 @@
             <a:prstDash val="solid"/>
           </a:ln>
         </p:spPr>
+        <p:txBody>
+          <a:bodyPr/>
+          <a:p/>
+        </p:txBody>
       </p:sp>
       <p:sp>
         <p:nvSpPr>
@@ -7673,6 +8101,10 @@
             <a:prstDash val="solid"/>
           </a:ln>
         </p:spPr>
+        <p:txBody>
+          <a:bodyPr/>
+          <a:p/>
+        </p:txBody>
       </p:sp>
       <p:sp>
         <p:nvSpPr>
@@ -7698,6 +8130,10 @@
             <a:prstDash val="solid"/>
           </a:ln>
         </p:spPr>
+        <p:txBody>
+          <a:bodyPr/>
+          <a:p/>
+        </p:txBody>
       </p:sp>
       <p:sp>
         <p:nvSpPr>
@@ -7842,6 +8278,10 @@
             <a:prstDash val="solid"/>
           </a:ln>
         </p:spPr>
+        <p:txBody>
+          <a:bodyPr/>
+          <a:p/>
+        </p:txBody>
       </p:sp>
       <p:sp>
         <p:nvSpPr>
@@ -7869,6 +8309,10 @@
             <a:prstDash val="solid"/>
           </a:ln>
         </p:spPr>
+        <p:txBody>
+          <a:bodyPr/>
+          <a:p/>
+        </p:txBody>
       </p:sp>
       <p:sp>
         <p:nvSpPr>
@@ -7935,6 +8379,10 @@
             <a:prstDash val="solid"/>
           </a:ln>
         </p:spPr>
+        <p:txBody>
+          <a:bodyPr/>
+          <a:p/>
+        </p:txBody>
       </p:sp>
       <p:sp>
         <p:nvSpPr>
@@ -8001,6 +8449,10 @@
             <a:prstDash val="solid"/>
           </a:ln>
         </p:spPr>
+        <p:txBody>
+          <a:bodyPr/>
+          <a:p/>
+        </p:txBody>
       </p:sp>
       <p:sp>
         <p:nvSpPr>
@@ -8026,6 +8478,10 @@
             <a:prstDash val="solid"/>
           </a:ln>
         </p:spPr>
+        <p:txBody>
+          <a:bodyPr/>
+          <a:p/>
+        </p:txBody>
       </p:sp>
       <p:sp>
         <p:nvSpPr>
@@ -8051,6 +8507,10 @@
             <a:prstDash val="solid"/>
           </a:ln>
         </p:spPr>
+        <p:txBody>
+          <a:bodyPr/>
+          <a:p/>
+        </p:txBody>
       </p:sp>
       <p:sp>
         <p:nvSpPr>
@@ -8195,6 +8655,10 @@
             <a:prstDash val="solid"/>
           </a:ln>
         </p:spPr>
+        <p:txBody>
+          <a:bodyPr/>
+          <a:p/>
+        </p:txBody>
       </p:sp>
       <p:sp>
         <p:nvSpPr>
@@ -8222,6 +8686,10 @@
             <a:prstDash val="solid"/>
           </a:ln>
         </p:spPr>
+        <p:txBody>
+          <a:bodyPr/>
+          <a:p/>
+        </p:txBody>
       </p:sp>
       <p:sp>
         <p:nvSpPr>
@@ -8288,6 +8756,10 @@
             <a:prstDash val="solid"/>
           </a:ln>
         </p:spPr>
+        <p:txBody>
+          <a:bodyPr/>
+          <a:p/>
+        </p:txBody>
       </p:sp>
       <p:sp>
         <p:nvSpPr>
@@ -8354,6 +8826,10 @@
             <a:prstDash val="solid"/>
           </a:ln>
         </p:spPr>
+        <p:txBody>
+          <a:bodyPr/>
+          <a:p/>
+        </p:txBody>
       </p:sp>
       <p:sp>
         <p:nvSpPr>
@@ -8379,6 +8855,10 @@
             <a:prstDash val="solid"/>
           </a:ln>
         </p:spPr>
+        <p:txBody>
+          <a:bodyPr/>
+          <a:p/>
+        </p:txBody>
       </p:sp>
       <p:sp>
         <p:nvSpPr>
@@ -8404,6 +8884,10 @@
             <a:prstDash val="solid"/>
           </a:ln>
         </p:spPr>
+        <p:txBody>
+          <a:bodyPr/>
+          <a:p/>
+        </p:txBody>
       </p:sp>
       <p:sp>
         <p:nvSpPr>
@@ -8548,6 +9032,10 @@
             <a:prstDash val="solid"/>
           </a:ln>
         </p:spPr>
+        <p:txBody>
+          <a:bodyPr/>
+          <a:p/>
+        </p:txBody>
       </p:sp>
       <p:sp>
         <p:nvSpPr>
@@ -8575,6 +9063,10 @@
             <a:prstDash val="solid"/>
           </a:ln>
         </p:spPr>
+        <p:txBody>
+          <a:bodyPr/>
+          <a:p/>
+        </p:txBody>
       </p:sp>
       <p:sp>
         <p:nvSpPr>
@@ -8641,6 +9133,10 @@
             <a:prstDash val="solid"/>
           </a:ln>
         </p:spPr>
+        <p:txBody>
+          <a:bodyPr/>
+          <a:p/>
+        </p:txBody>
       </p:sp>
       <p:sp>
         <p:nvSpPr>
@@ -8705,6 +9201,10 @@
             <a:prstDash val="solid"/>
           </a:ln>
         </p:spPr>
+        <p:txBody>
+          <a:bodyPr/>
+          <a:p/>
+        </p:txBody>
       </p:sp>
       <p:sp>
         <p:nvSpPr>
@@ -8739,7 +9239,7 @@
                 <a:ea typeface="Arial" pitchFamily="34" charset="-122"/>
                 <a:cs typeface="Arial" pitchFamily="34" charset="-120"/>
               </a:rPr>
-              <a:t>紧固件行业重点关注：过量生产、库存积压、搬运频繁</a:t>
+              <a:t>制造业重点关注：过量生产、库存积压、搬运频繁</a:t>
             </a:r>
             <a:endParaRPr lang="en-US" sz="1100" dirty="0"/>
           </a:p>
@@ -8794,6 +9294,10 @@
             <a:prstDash val="solid"/>
           </a:ln>
         </p:spPr>
+        <p:txBody>
+          <a:bodyPr/>
+          <a:p/>
+        </p:txBody>
       </p:sp>
       <p:sp>
         <p:nvSpPr>
@@ -8819,6 +9323,10 @@
             <a:prstDash val="solid"/>
           </a:ln>
         </p:spPr>
+        <p:txBody>
+          <a:bodyPr/>
+          <a:p/>
+        </p:txBody>
       </p:sp>
       <p:sp>
         <p:nvSpPr>
@@ -8844,6 +9352,10 @@
             <a:prstDash val="solid"/>
           </a:ln>
         </p:spPr>
+        <p:txBody>
+          <a:bodyPr/>
+          <a:p/>
+        </p:txBody>
       </p:sp>
       <p:sp>
         <p:nvSpPr>
@@ -8949,6 +9461,10 @@
             <a:prstDash val="solid"/>
           </a:ln>
         </p:spPr>
+        <p:txBody>
+          <a:bodyPr/>
+          <a:p/>
+        </p:txBody>
       </p:sp>
       <p:sp>
         <p:nvSpPr>
@@ -8976,6 +9492,10 @@
             <a:prstDash val="solid"/>
           </a:ln>
         </p:spPr>
+        <p:txBody>
+          <a:bodyPr/>
+          <a:p/>
+        </p:txBody>
       </p:sp>
       <p:sp>
         <p:nvSpPr>
@@ -9001,6 +9521,10 @@
             <a:prstDash val="solid"/>
           </a:ln>
         </p:spPr>
+        <p:txBody>
+          <a:bodyPr/>
+          <a:p/>
+        </p:txBody>
       </p:sp>
       <p:sp>
         <p:nvSpPr>
@@ -9143,6 +9667,10 @@
             <a:prstDash val="solid"/>
           </a:ln>
         </p:spPr>
+        <p:txBody>
+          <a:bodyPr/>
+          <a:p/>
+        </p:txBody>
       </p:sp>
       <p:sp>
         <p:nvSpPr>
@@ -9170,6 +9698,10 @@
             <a:prstDash val="solid"/>
           </a:ln>
         </p:spPr>
+        <p:txBody>
+          <a:bodyPr/>
+          <a:p/>
+        </p:txBody>
       </p:sp>
       <p:sp>
         <p:nvSpPr>
@@ -9197,6 +9729,10 @@
             <a:prstDash val="solid"/>
           </a:ln>
         </p:spPr>
+        <p:txBody>
+          <a:bodyPr/>
+          <a:p/>
+        </p:txBody>
       </p:sp>
       <p:sp>
         <p:nvSpPr>
@@ -9222,6 +9758,10 @@
             <a:prstDash val="solid"/>
           </a:ln>
         </p:spPr>
+        <p:txBody>
+          <a:bodyPr/>
+          <a:p/>
+        </p:txBody>
       </p:sp>
       <p:sp>
         <p:nvSpPr>
@@ -9364,6 +9904,10 @@
             <a:prstDash val="solid"/>
           </a:ln>
         </p:spPr>
+        <p:txBody>
+          <a:bodyPr/>
+          <a:p/>
+        </p:txBody>
       </p:sp>
       <p:sp>
         <p:nvSpPr>
@@ -9391,6 +9935,10 @@
             <a:prstDash val="solid"/>
           </a:ln>
         </p:spPr>
+        <p:txBody>
+          <a:bodyPr/>
+          <a:p/>
+        </p:txBody>
       </p:sp>
       <p:sp>
         <p:nvSpPr>
@@ -9418,6 +9966,10 @@
             <a:prstDash val="solid"/>
           </a:ln>
         </p:spPr>
+        <p:txBody>
+          <a:bodyPr/>
+          <a:p/>
+        </p:txBody>
       </p:sp>
       <p:sp>
         <p:nvSpPr>
@@ -9443,6 +9995,10 @@
             <a:prstDash val="solid"/>
           </a:ln>
         </p:spPr>
+        <p:txBody>
+          <a:bodyPr/>
+          <a:p/>
+        </p:txBody>
       </p:sp>
       <p:sp>
         <p:nvSpPr>
@@ -9585,6 +10141,10 @@
             <a:prstDash val="solid"/>
           </a:ln>
         </p:spPr>
+        <p:txBody>
+          <a:bodyPr/>
+          <a:p/>
+        </p:txBody>
       </p:sp>
       <p:sp>
         <p:nvSpPr>
@@ -9612,6 +10172,10 @@
             <a:prstDash val="solid"/>
           </a:ln>
         </p:spPr>
+        <p:txBody>
+          <a:bodyPr/>
+          <a:p/>
+        </p:txBody>
       </p:sp>
       <p:sp>
         <p:nvSpPr>
@@ -9639,6 +10203,10 @@
             <a:prstDash val="solid"/>
           </a:ln>
         </p:spPr>
+        <p:txBody>
+          <a:bodyPr/>
+          <a:p/>
+        </p:txBody>
       </p:sp>
       <p:sp>
         <p:nvSpPr>
@@ -9664,6 +10232,10 @@
             <a:prstDash val="solid"/>
           </a:ln>
         </p:spPr>
+        <p:txBody>
+          <a:bodyPr/>
+          <a:p/>
+        </p:txBody>
       </p:sp>
       <p:sp>
         <p:nvSpPr>
@@ -9806,6 +10378,10 @@
             <a:prstDash val="solid"/>
           </a:ln>
         </p:spPr>
+        <p:txBody>
+          <a:bodyPr/>
+          <a:p/>
+        </p:txBody>
       </p:sp>
       <p:sp>
         <p:nvSpPr>
@@ -9833,6 +10409,10 @@
             <a:prstDash val="solid"/>
           </a:ln>
         </p:spPr>
+        <p:txBody>
+          <a:bodyPr/>
+          <a:p/>
+        </p:txBody>
       </p:sp>
       <p:sp>
         <p:nvSpPr>
@@ -9860,6 +10440,10 @@
             <a:prstDash val="solid"/>
           </a:ln>
         </p:spPr>
+        <p:txBody>
+          <a:bodyPr/>
+          <a:p/>
+        </p:txBody>
       </p:sp>
       <p:sp>
         <p:nvSpPr>
@@ -9885,6 +10469,10 @@
             <a:prstDash val="solid"/>
           </a:ln>
         </p:spPr>
+        <p:txBody>
+          <a:bodyPr/>
+          <a:p/>
+        </p:txBody>
       </p:sp>
       <p:sp>
         <p:nvSpPr>
@@ -10027,6 +10615,10 @@
             <a:prstDash val="solid"/>
           </a:ln>
         </p:spPr>
+        <p:txBody>
+          <a:bodyPr/>
+          <a:p/>
+        </p:txBody>
       </p:sp>
       <p:sp>
         <p:nvSpPr>
@@ -10054,6 +10646,10 @@
             <a:prstDash val="solid"/>
           </a:ln>
         </p:spPr>
+        <p:txBody>
+          <a:bodyPr/>
+          <a:p/>
+        </p:txBody>
       </p:sp>
       <p:sp>
         <p:nvSpPr>
@@ -10081,6 +10677,10 @@
             <a:prstDash val="solid"/>
           </a:ln>
         </p:spPr>
+        <p:txBody>
+          <a:bodyPr/>
+          <a:p/>
+        </p:txBody>
       </p:sp>
       <p:sp>
         <p:nvSpPr>
@@ -10106,6 +10706,10 @@
             <a:prstDash val="solid"/>
           </a:ln>
         </p:spPr>
+        <p:txBody>
+          <a:bodyPr/>
+          <a:p/>
+        </p:txBody>
       </p:sp>
       <p:sp>
         <p:nvSpPr>
@@ -10248,6 +10852,10 @@
             <a:prstDash val="solid"/>
           </a:ln>
         </p:spPr>
+        <p:txBody>
+          <a:bodyPr/>
+          <a:p/>
+        </p:txBody>
       </p:sp>
       <p:sp>
         <p:nvSpPr>
@@ -10275,6 +10883,10 @@
             <a:prstDash val="solid"/>
           </a:ln>
         </p:spPr>
+        <p:txBody>
+          <a:bodyPr/>
+          <a:p/>
+        </p:txBody>
       </p:sp>
       <p:sp>
         <p:nvSpPr>
@@ -10302,6 +10914,10 @@
             <a:prstDash val="solid"/>
           </a:ln>
         </p:spPr>
+        <p:txBody>
+          <a:bodyPr/>
+          <a:p/>
+        </p:txBody>
       </p:sp>
       <p:sp>
         <p:nvSpPr>
@@ -10327,6 +10943,10 @@
             <a:prstDash val="solid"/>
           </a:ln>
         </p:spPr>
+        <p:txBody>
+          <a:bodyPr/>
+          <a:p/>
+        </p:txBody>
       </p:sp>
       <p:sp>
         <p:nvSpPr>
@@ -10469,6 +11089,10 @@
             <a:prstDash val="solid"/>
           </a:ln>
         </p:spPr>
+        <p:txBody>
+          <a:bodyPr/>
+          <a:p/>
+        </p:txBody>
       </p:sp>
       <p:sp>
         <p:nvSpPr>
@@ -10496,6 +11120,10 @@
             <a:prstDash val="solid"/>
           </a:ln>
         </p:spPr>
+        <p:txBody>
+          <a:bodyPr/>
+          <a:p/>
+        </p:txBody>
       </p:sp>
       <p:sp>
         <p:nvSpPr>
@@ -10523,6 +11151,10 @@
             <a:prstDash val="solid"/>
           </a:ln>
         </p:spPr>
+        <p:txBody>
+          <a:bodyPr/>
+          <a:p/>
+        </p:txBody>
       </p:sp>
       <p:sp>
         <p:nvSpPr>
@@ -10548,6 +11180,10 @@
             <a:prstDash val="solid"/>
           </a:ln>
         </p:spPr>
+        <p:txBody>
+          <a:bodyPr/>
+          <a:p/>
+        </p:txBody>
       </p:sp>
       <p:sp>
         <p:nvSpPr>
@@ -10690,6 +11326,10 @@
             <a:prstDash val="solid"/>
           </a:ln>
         </p:spPr>
+        <p:txBody>
+          <a:bodyPr/>
+          <a:p/>
+        </p:txBody>
       </p:sp>
       <p:sp>
         <p:nvSpPr>
@@ -10717,6 +11357,10 @@
             <a:prstDash val="solid"/>
           </a:ln>
         </p:spPr>
+        <p:txBody>
+          <a:bodyPr/>
+          <a:p/>
+        </p:txBody>
       </p:sp>
       <p:sp>
         <p:nvSpPr>
@@ -10744,6 +11388,10 @@
             <a:prstDash val="solid"/>
           </a:ln>
         </p:spPr>
+        <p:txBody>
+          <a:bodyPr/>
+          <a:p/>
+        </p:txBody>
       </p:sp>
       <p:sp>
         <p:nvSpPr>
@@ -10769,6 +11417,10 @@
             <a:prstDash val="solid"/>
           </a:ln>
         </p:spPr>
+        <p:txBody>
+          <a:bodyPr/>
+          <a:p/>
+        </p:txBody>
       </p:sp>
       <p:sp>
         <p:nvSpPr>
@@ -10911,6 +11563,10 @@
             <a:prstDash val="solid"/>
           </a:ln>
         </p:spPr>
+        <p:txBody>
+          <a:bodyPr/>
+          <a:p/>
+        </p:txBody>
       </p:sp>
       <p:sp>
         <p:nvSpPr>
@@ -10938,6 +11594,10 @@
             <a:prstDash val="solid"/>
           </a:ln>
         </p:spPr>
+        <p:txBody>
+          <a:bodyPr/>
+          <a:p/>
+        </p:txBody>
       </p:sp>
       <p:sp>
         <p:nvSpPr>
@@ -10965,6 +11625,10 @@
             <a:prstDash val="solid"/>
           </a:ln>
         </p:spPr>
+        <p:txBody>
+          <a:bodyPr/>
+          <a:p/>
+        </p:txBody>
       </p:sp>
       <p:sp>
         <p:nvSpPr>
@@ -10990,6 +11654,10 @@
             <a:prstDash val="solid"/>
           </a:ln>
         </p:spPr>
+        <p:txBody>
+          <a:bodyPr/>
+          <a:p/>
+        </p:txBody>
       </p:sp>
       <p:sp>
         <p:nvSpPr>
@@ -11132,6 +11800,10 @@
             <a:prstDash val="solid"/>
           </a:ln>
         </p:spPr>
+        <p:txBody>
+          <a:bodyPr/>
+          <a:p/>
+        </p:txBody>
       </p:sp>
       <p:sp>
         <p:nvSpPr>
@@ -11159,6 +11831,10 @@
             <a:prstDash val="solid"/>
           </a:ln>
         </p:spPr>
+        <p:txBody>
+          <a:bodyPr/>
+          <a:p/>
+        </p:txBody>
       </p:sp>
       <p:sp>
         <p:nvSpPr>
@@ -11186,6 +11862,10 @@
             <a:prstDash val="solid"/>
           </a:ln>
         </p:spPr>
+        <p:txBody>
+          <a:bodyPr/>
+          <a:p/>
+        </p:txBody>
       </p:sp>
       <p:sp>
         <p:nvSpPr>
@@ -11211,6 +11891,10 @@
             <a:prstDash val="solid"/>
           </a:ln>
         </p:spPr>
+        <p:txBody>
+          <a:bodyPr/>
+          <a:p/>
+        </p:txBody>
       </p:sp>
       <p:sp>
         <p:nvSpPr>
@@ -11353,6 +12037,10 @@
             <a:prstDash val="solid"/>
           </a:ln>
         </p:spPr>
+        <p:txBody>
+          <a:bodyPr/>
+          <a:p/>
+        </p:txBody>
       </p:sp>
       <p:sp>
         <p:nvSpPr>
@@ -11380,6 +12068,10 @@
             <a:prstDash val="solid"/>
           </a:ln>
         </p:spPr>
+        <p:txBody>
+          <a:bodyPr/>
+          <a:p/>
+        </p:txBody>
       </p:sp>
       <p:sp>
         <p:nvSpPr>
@@ -11407,6 +12099,10 @@
             <a:prstDash val="solid"/>
           </a:ln>
         </p:spPr>
+        <p:txBody>
+          <a:bodyPr/>
+          <a:p/>
+        </p:txBody>
       </p:sp>
       <p:sp>
         <p:nvSpPr>
@@ -11432,6 +12128,10 @@
             <a:prstDash val="solid"/>
           </a:ln>
         </p:spPr>
+        <p:txBody>
+          <a:bodyPr/>
+          <a:p/>
+        </p:txBody>
       </p:sp>
       <p:sp>
         <p:nvSpPr>
@@ -11574,6 +12274,10 @@
             <a:prstDash val="solid"/>
           </a:ln>
         </p:spPr>
+        <p:txBody>
+          <a:bodyPr/>
+          <a:p/>
+        </p:txBody>
       </p:sp>
       <p:sp>
         <p:nvSpPr>
@@ -11601,6 +12305,10 @@
             <a:prstDash val="solid"/>
           </a:ln>
         </p:spPr>
+        <p:txBody>
+          <a:bodyPr/>
+          <a:p/>
+        </p:txBody>
       </p:sp>
       <p:sp>
         <p:nvSpPr>
@@ -11628,6 +12336,10 @@
             <a:prstDash val="solid"/>
           </a:ln>
         </p:spPr>
+        <p:txBody>
+          <a:bodyPr/>
+          <a:p/>
+        </p:txBody>
       </p:sp>
       <p:sp>
         <p:nvSpPr>
@@ -11653,6 +12365,10 @@
             <a:prstDash val="solid"/>
           </a:ln>
         </p:spPr>
+        <p:txBody>
+          <a:bodyPr/>
+          <a:p/>
+        </p:txBody>
       </p:sp>
       <p:sp>
         <p:nvSpPr>
@@ -11795,6 +12511,10 @@
             <a:prstDash val="solid"/>
           </a:ln>
         </p:spPr>
+        <p:txBody>
+          <a:bodyPr/>
+          <a:p/>
+        </p:txBody>
       </p:sp>
       <p:sp>
         <p:nvSpPr>
@@ -11822,6 +12542,10 @@
             <a:prstDash val="solid"/>
           </a:ln>
         </p:spPr>
+        <p:txBody>
+          <a:bodyPr/>
+          <a:p/>
+        </p:txBody>
       </p:sp>
       <p:sp>
         <p:nvSpPr>
@@ -11925,6 +12649,10 @@
             <a:prstDash val="solid"/>
           </a:ln>
         </p:spPr>
+        <p:txBody>
+          <a:bodyPr/>
+          <a:p/>
+        </p:txBody>
       </p:sp>
       <p:sp>
         <p:nvSpPr>
@@ -12014,6 +12742,10 @@
             <a:prstDash val="solid"/>
           </a:ln>
         </p:spPr>
+        <p:txBody>
+          <a:bodyPr/>
+          <a:p/>
+        </p:txBody>
       </p:sp>
       <p:sp>
         <p:nvSpPr>
@@ -12039,6 +12771,10 @@
             <a:prstDash val="solid"/>
           </a:ln>
         </p:spPr>
+        <p:txBody>
+          <a:bodyPr/>
+          <a:p/>
+        </p:txBody>
       </p:sp>
       <p:sp>
         <p:nvSpPr>
@@ -12064,6 +12800,10 @@
             <a:prstDash val="solid"/>
           </a:ln>
         </p:spPr>
+        <p:txBody>
+          <a:bodyPr/>
+          <a:p/>
+        </p:txBody>
       </p:sp>
       <p:sp>
         <p:nvSpPr>
@@ -12169,6 +12909,10 @@
             <a:prstDash val="solid"/>
           </a:ln>
         </p:spPr>
+        <p:txBody>
+          <a:bodyPr/>
+          <a:p/>
+        </p:txBody>
       </p:sp>
       <p:sp>
         <p:nvSpPr>
@@ -12233,6 +12977,10 @@
             <a:prstDash val="solid"/>
           </a:ln>
         </p:spPr>
+        <p:txBody>
+          <a:bodyPr/>
+          <a:p/>
+        </p:txBody>
       </p:sp>
       <p:sp>
         <p:nvSpPr>
@@ -12258,6 +13006,10 @@
             <a:prstDash val="solid"/>
           </a:ln>
         </p:spPr>
+        <p:txBody>
+          <a:bodyPr/>
+          <a:p/>
+        </p:txBody>
       </p:sp>
       <p:sp>
         <p:nvSpPr>
@@ -12283,6 +13035,10 @@
             <a:prstDash val="solid"/>
           </a:ln>
         </p:spPr>
+        <p:txBody>
+          <a:bodyPr/>
+          <a:p/>
+        </p:txBody>
       </p:sp>
       <p:sp>
         <p:nvSpPr>
@@ -12310,6 +13066,10 @@
             <a:prstDash val="solid"/>
           </a:ln>
         </p:spPr>
+        <p:txBody>
+          <a:bodyPr/>
+          <a:p/>
+        </p:txBody>
       </p:sp>
       <p:sp>
         <p:nvSpPr>
@@ -12413,6 +13173,10 @@
             <a:prstDash val="solid"/>
           </a:ln>
         </p:spPr>
+        <p:txBody>
+          <a:bodyPr/>
+          <a:p/>
+        </p:txBody>
       </p:sp>
       <p:sp>
         <p:nvSpPr>
@@ -12440,6 +13204,10 @@
             <a:prstDash val="solid"/>
           </a:ln>
         </p:spPr>
+        <p:txBody>
+          <a:bodyPr/>
+          <a:p/>
+        </p:txBody>
       </p:sp>
       <p:sp>
         <p:nvSpPr>
@@ -12543,6 +13311,10 @@
             <a:prstDash val="solid"/>
           </a:ln>
         </p:spPr>
+        <p:txBody>
+          <a:bodyPr/>
+          <a:p/>
+        </p:txBody>
       </p:sp>
       <p:sp>
         <p:nvSpPr>
@@ -12570,6 +13342,10 @@
             <a:prstDash val="solid"/>
           </a:ln>
         </p:spPr>
+        <p:txBody>
+          <a:bodyPr/>
+          <a:p/>
+        </p:txBody>
       </p:sp>
       <p:sp>
         <p:nvSpPr>
@@ -12673,6 +13449,10 @@
             <a:prstDash val="solid"/>
           </a:ln>
         </p:spPr>
+        <p:txBody>
+          <a:bodyPr/>
+          <a:p/>
+        </p:txBody>
       </p:sp>
       <p:sp>
         <p:nvSpPr>
@@ -12700,6 +13480,10 @@
             <a:prstDash val="solid"/>
           </a:ln>
         </p:spPr>
+        <p:txBody>
+          <a:bodyPr/>
+          <a:p/>
+        </p:txBody>
       </p:sp>
       <p:sp>
         <p:nvSpPr>
@@ -12803,6 +13587,10 @@
             <a:prstDash val="solid"/>
           </a:ln>
         </p:spPr>
+        <p:txBody>
+          <a:bodyPr/>
+          <a:p/>
+        </p:txBody>
       </p:sp>
       <p:sp>
         <p:nvSpPr>
@@ -12830,6 +13618,10 @@
             <a:prstDash val="solid"/>
           </a:ln>
         </p:spPr>
+        <p:txBody>
+          <a:bodyPr/>
+          <a:p/>
+        </p:txBody>
       </p:sp>
       <p:sp>
         <p:nvSpPr>
@@ -12855,6 +13647,10 @@
             <a:prstDash val="solid"/>
           </a:ln>
         </p:spPr>
+        <p:txBody>
+          <a:bodyPr/>
+          <a:p/>
+        </p:txBody>
       </p:sp>
       <p:sp>
         <p:nvSpPr>
@@ -12921,6 +13717,10 @@
             <a:prstDash val="solid"/>
           </a:ln>
         </p:spPr>
+        <p:txBody>
+          <a:bodyPr/>
+          <a:p/>
+        </p:txBody>
       </p:sp>
       <p:sp>
         <p:nvSpPr>
@@ -12946,6 +13746,10 @@
             <a:prstDash val="solid"/>
           </a:ln>
         </p:spPr>
+        <p:txBody>
+          <a:bodyPr/>
+          <a:p/>
+        </p:txBody>
       </p:sp>
       <p:sp>
         <p:nvSpPr>
@@ -13012,6 +13816,10 @@
             <a:prstDash val="solid"/>
           </a:ln>
         </p:spPr>
+        <p:txBody>
+          <a:bodyPr/>
+          <a:p/>
+        </p:txBody>
       </p:sp>
       <p:sp>
         <p:nvSpPr>
@@ -13037,6 +13845,10 @@
             <a:prstDash val="solid"/>
           </a:ln>
         </p:spPr>
+        <p:txBody>
+          <a:bodyPr/>
+          <a:p/>
+        </p:txBody>
       </p:sp>
       <p:sp>
         <p:nvSpPr>
@@ -13101,6 +13913,10 @@
             <a:prstDash val="solid"/>
           </a:ln>
         </p:spPr>
+        <p:txBody>
+          <a:bodyPr/>
+          <a:p/>
+        </p:txBody>
       </p:sp>
       <p:sp>
         <p:nvSpPr>
@@ -13128,6 +13944,10 @@
             <a:prstDash val="solid"/>
           </a:ln>
         </p:spPr>
+        <p:txBody>
+          <a:bodyPr/>
+          <a:p/>
+        </p:txBody>
       </p:sp>
       <p:sp>
         <p:nvSpPr>
@@ -13153,6 +13973,10 @@
             <a:prstDash val="solid"/>
           </a:ln>
         </p:spPr>
+        <p:txBody>
+          <a:bodyPr/>
+          <a:p/>
+        </p:txBody>
       </p:sp>
       <p:sp>
         <p:nvSpPr>
@@ -13219,6 +14043,10 @@
             <a:prstDash val="solid"/>
           </a:ln>
         </p:spPr>
+        <p:txBody>
+          <a:bodyPr/>
+          <a:p/>
+        </p:txBody>
       </p:sp>
       <p:sp>
         <p:nvSpPr>
@@ -13244,6 +14072,10 @@
             <a:prstDash val="solid"/>
           </a:ln>
         </p:spPr>
+        <p:txBody>
+          <a:bodyPr/>
+          <a:p/>
+        </p:txBody>
       </p:sp>
       <p:sp>
         <p:nvSpPr>
@@ -13310,6 +14142,10 @@
             <a:prstDash val="solid"/>
           </a:ln>
         </p:spPr>
+        <p:txBody>
+          <a:bodyPr/>
+          <a:p/>
+        </p:txBody>
       </p:sp>
       <p:sp>
         <p:nvSpPr>
@@ -13335,6 +14171,10 @@
             <a:prstDash val="solid"/>
           </a:ln>
         </p:spPr>
+        <p:txBody>
+          <a:bodyPr/>
+          <a:p/>
+        </p:txBody>
       </p:sp>
       <p:sp>
         <p:nvSpPr>
@@ -13399,6 +14239,10 @@
             <a:prstDash val="solid"/>
           </a:ln>
         </p:spPr>
+        <p:txBody>
+          <a:bodyPr/>
+          <a:p/>
+        </p:txBody>
       </p:sp>
       <p:sp>
         <p:nvSpPr>
@@ -13426,6 +14270,10 @@
             <a:prstDash val="solid"/>
           </a:ln>
         </p:spPr>
+        <p:txBody>
+          <a:bodyPr/>
+          <a:p/>
+        </p:txBody>
       </p:sp>
       <p:sp>
         <p:nvSpPr>
@@ -13451,6 +14299,10 @@
             <a:prstDash val="solid"/>
           </a:ln>
         </p:spPr>
+        <p:txBody>
+          <a:bodyPr/>
+          <a:p/>
+        </p:txBody>
       </p:sp>
       <p:sp>
         <p:nvSpPr>
@@ -13517,6 +14369,10 @@
             <a:prstDash val="solid"/>
           </a:ln>
         </p:spPr>
+        <p:txBody>
+          <a:bodyPr/>
+          <a:p/>
+        </p:txBody>
       </p:sp>
       <p:sp>
         <p:nvSpPr>
@@ -13542,6 +14398,10 @@
             <a:prstDash val="solid"/>
           </a:ln>
         </p:spPr>
+        <p:txBody>
+          <a:bodyPr/>
+          <a:p/>
+        </p:txBody>
       </p:sp>
       <p:sp>
         <p:nvSpPr>
@@ -13608,6 +14468,10 @@
             <a:prstDash val="solid"/>
           </a:ln>
         </p:spPr>
+        <p:txBody>
+          <a:bodyPr/>
+          <a:p/>
+        </p:txBody>
       </p:sp>
       <p:sp>
         <p:nvSpPr>
@@ -13633,6 +14497,10 @@
             <a:prstDash val="solid"/>
           </a:ln>
         </p:spPr>
+        <p:txBody>
+          <a:bodyPr/>
+          <a:p/>
+        </p:txBody>
       </p:sp>
       <p:sp>
         <p:nvSpPr>
@@ -13697,6 +14565,10 @@
             <a:prstDash val="solid"/>
           </a:ln>
         </p:spPr>
+        <p:txBody>
+          <a:bodyPr/>
+          <a:p/>
+        </p:txBody>
       </p:sp>
       <p:sp>
         <p:nvSpPr>
@@ -13724,6 +14596,10 @@
             <a:prstDash val="solid"/>
           </a:ln>
         </p:spPr>
+        <p:txBody>
+          <a:bodyPr/>
+          <a:p/>
+        </p:txBody>
       </p:sp>
       <p:sp>
         <p:nvSpPr>
@@ -13749,6 +14625,10 @@
             <a:prstDash val="solid"/>
           </a:ln>
         </p:spPr>
+        <p:txBody>
+          <a:bodyPr/>
+          <a:p/>
+        </p:txBody>
       </p:sp>
       <p:sp>
         <p:nvSpPr>
@@ -13815,6 +14695,10 @@
             <a:prstDash val="solid"/>
           </a:ln>
         </p:spPr>
+        <p:txBody>
+          <a:bodyPr/>
+          <a:p/>
+        </p:txBody>
       </p:sp>
       <p:sp>
         <p:nvSpPr>
@@ -13840,6 +14724,10 @@
             <a:prstDash val="solid"/>
           </a:ln>
         </p:spPr>
+        <p:txBody>
+          <a:bodyPr/>
+          <a:p/>
+        </p:txBody>
       </p:sp>
       <p:sp>
         <p:nvSpPr>
@@ -13906,6 +14794,10 @@
             <a:prstDash val="solid"/>
           </a:ln>
         </p:spPr>
+        <p:txBody>
+          <a:bodyPr/>
+          <a:p/>
+        </p:txBody>
       </p:sp>
       <p:sp>
         <p:nvSpPr>
@@ -13931,6 +14823,10 @@
             <a:prstDash val="solid"/>
           </a:ln>
         </p:spPr>
+        <p:txBody>
+          <a:bodyPr/>
+          <a:p/>
+        </p:txBody>
       </p:sp>
       <p:sp>
         <p:nvSpPr>
@@ -13997,6 +14893,10 @@
             <a:prstDash val="solid"/>
           </a:ln>
         </p:spPr>
+        <p:txBody>
+          <a:bodyPr/>
+          <a:p/>
+        </p:txBody>
       </p:sp>
       <p:sp>
         <p:nvSpPr>
@@ -14061,6 +14961,10 @@
             <a:prstDash val="solid"/>
           </a:ln>
         </p:spPr>
+        <p:txBody>
+          <a:bodyPr/>
+          <a:p/>
+        </p:txBody>
       </p:sp>
       <p:sp>
         <p:nvSpPr>
